--- a/site/lectures/week02-session1.pptx
+++ b/site/lectures/week02-session1.pptx
@@ -9477,7 +9477,7 @@
                 <a:ea typeface="Calibri" pitchFamily="34" charset="-122"/>
                 <a:cs typeface="Calibri" pitchFamily="34" charset="-120"/>
               </a:rPr>
-              <a:t>The capability tree after the corrections: CAP-007 corrected to both noise limits; NEED-011 moved from CAP-005 to a proposed CAP-015; and four proposed capabilities for the needs added in Week 1 (proposed, instructor to confirm).</a:t>
+              <a:t>The capability tree after the corrections: CAP-007 corrected to both noise limits; NEED-011 moved from CAP-005 to a proposed CAP-015; and four proposed capabilities for the needs added in Week 1.</a:t>
             </a:r>
             <a:endParaRPr lang="en-US" sz="1050" dirty="0"/>
           </a:p>
